--- a/presentation/Module-7_Multi-Agent-Workflows-and-Team-Adoption.pptx
+++ b/presentation/Module-7_Multi-Agent-Workflows-and-Team-Adoption.pptx
@@ -16,10 +16,9 @@
     <p:sldId id="264" r:id="rId10"/>
     <p:sldId id="265" r:id="rId11"/>
     <p:sldId id="266" r:id="rId12"/>
-    <p:sldId id="267" r:id="rId13"/>
   </p:sldIdLst>
   <p:notesMasterIdLst>
-    <p:notesMasterId r:id="rId14"/>
+    <p:notesMasterId r:id="rId13"/>
   </p:notesMasterIdLst>
   <p:sldSz cx="12192000" cy="6858000"/>
   <p:notesSz cx="6858000" cy="12192000"/>
@@ -713,94 +712,6 @@
             <a:fld id="{F7021451-1387-4CA6-816F-3879F97B5CBC}" type="slidenum">
               <a:rPr lang="en-US"/>
               <a:t>11</a:t>
-            </a:fld>
-            <a:endParaRPr lang="en-US"/>
-          </a:p>
-        </p:txBody>
-      </p:sp>
-    </p:spTree>
-    <p:extLst>
-      <p:ext uri="{BB962C8B-B14F-4D97-AF65-F5344CB8AC3E}">
-        <p14:creationId xmlns:p14="http://schemas.microsoft.com/office/powerpoint/2010/main" val="1024086991"/>
-      </p:ext>
-    </p:extLst>
-  </p:cSld>
-  <p:clrMapOvr>
-    <a:masterClrMapping/>
-  </p:clrMapOvr>
-</p:notes>
-</file>
-
-<file path=ppt/notesSlides/notesSlide12.xml><?xml version="1.0" encoding="utf-8"?>
-<p:notes xmlns:a="http://schemas.openxmlformats.org/drawingml/2006/main" xmlns:r="http://schemas.openxmlformats.org/officeDocument/2006/relationships" xmlns:p="http://schemas.openxmlformats.org/presentationml/2006/main">
-  <p:cSld>
-    <p:spTree>
-      <p:nvGrpSpPr>
-        <p:cNvPr id="1" name=""/>
-        <p:cNvGrpSpPr/>
-        <p:nvPr/>
-      </p:nvGrpSpPr>
-      <p:grpSpPr>
-        <a:xfrm>
-          <a:off x="0" y="0"/>
-          <a:ext cx="0" cy="0"/>
-          <a:chOff x="0" y="0"/>
-          <a:chExt cx="0" cy="0"/>
-        </a:xfrm>
-      </p:grpSpPr>
-      <p:sp>
-        <p:nvSpPr>
-          <p:cNvPr id="2" name="Slide Image Placeholder 1"/>
-          <p:cNvSpPr>
-            <a:spLocks noGrp="1" noRot="1" noChangeAspect="1"/>
-          </p:cNvSpPr>
-          <p:nvPr>
-            <p:ph type="sldImg"/>
-          </p:nvPr>
-        </p:nvSpPr>
-        <p:spPr/>
-      </p:sp>
-      <p:sp>
-        <p:nvSpPr>
-          <p:cNvPr id="3" name="Notes Placeholder 2"/>
-          <p:cNvSpPr>
-            <a:spLocks noGrp="1"/>
-          </p:cNvSpPr>
-          <p:nvPr>
-            <p:ph type="body" idx="1"/>
-          </p:nvPr>
-        </p:nvSpPr>
-        <p:spPr/>
-        <p:txBody>
-          <a:bodyPr/>
-          <a:lstStyle/>
-          <a:p>
-            <a:r>
-              <a:rPr lang="en-US" dirty="0"/>
-              <a:t/>
-            </a:r>
-            <a:endParaRPr lang="en-US" dirty="0"/>
-          </a:p>
-        </p:txBody>
-      </p:sp>
-      <p:sp>
-        <p:nvSpPr>
-          <p:cNvPr id="4" name="Slide Number Placeholder 3"/>
-          <p:cNvSpPr>
-            <a:spLocks noGrp="1"/>
-          </p:cNvSpPr>
-          <p:nvPr>
-            <p:ph type="sldNum" sz="quarter" idx="10"/>
-          </p:nvPr>
-        </p:nvSpPr>
-        <p:spPr/>
-        <p:txBody>
-          <a:bodyPr/>
-          <a:lstStyle/>
-          <a:p>
-            <a:fld id="{F7021451-1387-4CA6-816F-3879F97B5CBC}" type="slidenum">
-              <a:rPr lang="en-US"/>
-              <a:t>12</a:t>
             </a:fld>
             <a:endParaRPr lang="en-US"/>
           </a:p>
@@ -3384,260 +3295,6 @@
 </p:sld>
 </file>
 
-<file path=ppt/slides/slide12.xml><?xml version="1.0" encoding="utf-8"?>
-<p:sld xmlns:a="http://schemas.openxmlformats.org/drawingml/2006/main" xmlns:r="http://schemas.openxmlformats.org/officeDocument/2006/relationships" xmlns:p="http://schemas.openxmlformats.org/presentationml/2006/main">
-  <p:cSld name="Slide 12">
-    <p:bg>
-      <p:bgPr>
-        <a:solidFill>
-          <a:srgbClr val="FFFFFF"/>
-        </a:solidFill>
-      </p:bgPr>
-    </p:bg>
-    <p:spTree>
-      <p:nvGrpSpPr>
-        <p:cNvPr id="1" name=""/>
-        <p:cNvGrpSpPr/>
-        <p:nvPr/>
-      </p:nvGrpSpPr>
-      <p:grpSpPr>
-        <a:xfrm>
-          <a:off x="0" y="0"/>
-          <a:ext cx="0" cy="0"/>
-          <a:chOff x="0" y="0"/>
-          <a:chExt cx="0" cy="0"/>
-        </a:xfrm>
-      </p:grpSpPr>
-      <p:sp>
-        <p:nvSpPr>
-          <p:cNvPr id="2" name="Shape 0"/>
-          <p:cNvSpPr/>
-          <p:nvPr/>
-        </p:nvSpPr>
-        <p:spPr>
-          <a:xfrm>
-            <a:off x="548640" y="1828800"/>
-            <a:ext cx="11094415" cy="2377440"/>
-          </a:xfrm>
-          <a:prstGeom prst="roundRect">
-            <a:avLst>
-              <a:gd name="adj" fmla="val 4615"/>
-            </a:avLst>
-          </a:prstGeom>
-          <a:solidFill>
-            <a:srgbClr val="F2F5F9"/>
-          </a:solidFill>
-          <a:ln w="15875">
-            <a:solidFill>
-              <a:srgbClr val="C0504D"/>
-            </a:solidFill>
-            <a:prstDash val="solid"/>
-          </a:ln>
-        </p:spPr>
-      </p:sp>
-      <p:sp>
-        <p:nvSpPr>
-          <p:cNvPr id="3" name="Text 1"/>
-          <p:cNvSpPr/>
-          <p:nvPr/>
-        </p:nvSpPr>
-        <p:spPr>
-          <a:xfrm>
-            <a:off x="1005840" y="2103120"/>
-            <a:ext cx="10180015" cy="365760"/>
-          </a:xfrm>
-          <a:prstGeom prst="rect">
-            <a:avLst/>
-          </a:prstGeom>
-          <a:noFill/>
-          <a:ln/>
-        </p:spPr>
-        <p:txBody>
-          <a:bodyPr wrap="square" rtlCol="0" anchor="ctr"/>
-          <a:lstStyle/>
-          <a:p>
-            <a:pPr indent="0" marL="0">
-              <a:buNone/>
-            </a:pPr>
-            <a:r>
-              <a:rPr lang="en-US" sz="1300" b="1" spc="150" kern="0" dirty="0">
-                <a:solidFill>
-                  <a:srgbClr val="C0504D"/>
-                </a:solidFill>
-                <a:latin typeface="Calibri" pitchFamily="34" charset="0"/>
-                <a:ea typeface="Calibri" pitchFamily="34" charset="-122"/>
-                <a:cs typeface="Calibri" pitchFamily="34" charset="-120"/>
-              </a:rPr>
-              <a:t>HANDS-ON NEXT</a:t>
-            </a:r>
-            <a:endParaRPr lang="en-US" sz="1300" dirty="0"/>
-          </a:p>
-        </p:txBody>
-      </p:sp>
-      <p:sp>
-        <p:nvSpPr>
-          <p:cNvPr id="4" name="Text 2"/>
-          <p:cNvSpPr/>
-          <p:nvPr/>
-        </p:nvSpPr>
-        <p:spPr>
-          <a:xfrm>
-            <a:off x="1005840" y="2514600"/>
-            <a:ext cx="10180015" cy="1463040"/>
-          </a:xfrm>
-          <a:prstGeom prst="rect">
-            <a:avLst/>
-          </a:prstGeom>
-          <a:noFill/>
-          <a:ln/>
-        </p:spPr>
-        <p:txBody>
-          <a:bodyPr wrap="square" rtlCol="0" anchor="t"/>
-          <a:lstStyle/>
-          <a:p>
-            <a:pPr indent="0" marL="0">
-              <a:buNone/>
-            </a:pPr>
-            <a:r>
-              <a:rPr lang="en-US" sz="1700" dirty="0">
-                <a:solidFill>
-                  <a:srgbClr val="1B2A4A"/>
-                </a:solidFill>
-                <a:latin typeface="Calibri" pitchFamily="34" charset="0"/>
-                <a:ea typeface="Calibri" pitchFamily="34" charset="-122"/>
-                <a:cs typeface="Calibri" pitchFamily="34" charset="-120"/>
-              </a:rPr>
-              <a:t>Propose and review an agent-generated plan for your project's next multi-step increment before execution. Delegate a focused sub-task to a second agent instance, then critique the delegated output and document what review step should have caught any issues.</a:t>
-            </a:r>
-            <a:endParaRPr lang="en-US" sz="1700" dirty="0"/>
-          </a:p>
-        </p:txBody>
-      </p:sp>
-      <p:sp>
-        <p:nvSpPr>
-          <p:cNvPr id="5" name="Text 3"/>
-          <p:cNvSpPr/>
-          <p:nvPr/>
-        </p:nvSpPr>
-        <p:spPr>
-          <a:xfrm>
-            <a:off x="548640" y="4480560"/>
-            <a:ext cx="11094415" cy="457200"/>
-          </a:xfrm>
-          <a:prstGeom prst="rect">
-            <a:avLst/>
-          </a:prstGeom>
-          <a:noFill/>
-          <a:ln/>
-        </p:spPr>
-        <p:txBody>
-          <a:bodyPr wrap="square" rtlCol="0" anchor="ctr"/>
-          <a:lstStyle/>
-          <a:p>
-            <a:pPr algn="ctr" indent="0" marL="0">
-              <a:buNone/>
-            </a:pPr>
-            <a:r>
-              <a:rPr lang="en-US" sz="1300" i="1" dirty="0">
-                <a:solidFill>
-                  <a:srgbClr val="5A6B85"/>
-                </a:solidFill>
-                <a:latin typeface="Calibri" pitchFamily="34" charset="0"/>
-                <a:ea typeface="Calibri" pitchFamily="34" charset="-122"/>
-                <a:cs typeface="Calibri" pitchFamily="34" charset="-120"/>
-              </a:rPr>
-              <a:t>Next: Module 8: Common Pitfalls and Anti-Patterns</a:t>
-            </a:r>
-            <a:endParaRPr lang="en-US" sz="1300" dirty="0"/>
-          </a:p>
-        </p:txBody>
-      </p:sp>
-      <p:sp>
-        <p:nvSpPr>
-          <p:cNvPr id="6" name="Text 4"/>
-          <p:cNvSpPr/>
-          <p:nvPr/>
-        </p:nvSpPr>
-        <p:spPr>
-          <a:xfrm>
-            <a:off x="548640" y="6473952"/>
-            <a:ext cx="5486400" cy="274320"/>
-          </a:xfrm>
-          <a:prstGeom prst="rect">
-            <a:avLst/>
-          </a:prstGeom>
-          <a:noFill/>
-          <a:ln/>
-        </p:spPr>
-        <p:txBody>
-          <a:bodyPr wrap="square" rtlCol="0" anchor="ctr"/>
-          <a:lstStyle/>
-          <a:p>
-            <a:pPr algn="l" indent="0" marL="0">
-              <a:buNone/>
-            </a:pPr>
-            <a:r>
-              <a:rPr lang="en-US" sz="1000" dirty="0">
-                <a:solidFill>
-                  <a:srgbClr val="5A6B85"/>
-                </a:solidFill>
-                <a:latin typeface="Calibri" pitchFamily="34" charset="0"/>
-                <a:ea typeface="Calibri" pitchFamily="34" charset="-122"/>
-                <a:cs typeface="Calibri" pitchFamily="34" charset="-120"/>
-              </a:rPr>
-              <a:t>Module 7</a:t>
-            </a:r>
-            <a:endParaRPr lang="en-US" sz="1000" dirty="0"/>
-          </a:p>
-        </p:txBody>
-      </p:sp>
-      <p:sp>
-        <p:nvSpPr>
-          <p:cNvPr id="7" name="Text 5"/>
-          <p:cNvSpPr/>
-          <p:nvPr/>
-        </p:nvSpPr>
-        <p:spPr>
-          <a:xfrm>
-            <a:off x="6156655" y="6473952"/>
-            <a:ext cx="5486400" cy="274320"/>
-          </a:xfrm>
-          <a:prstGeom prst="rect">
-            <a:avLst/>
-          </a:prstGeom>
-          <a:noFill/>
-          <a:ln/>
-        </p:spPr>
-        <p:txBody>
-          <a:bodyPr wrap="square" rtlCol="0" anchor="ctr"/>
-          <a:lstStyle/>
-          <a:p>
-            <a:pPr algn="r" indent="0" marL="0">
-              <a:buNone/>
-            </a:pPr>
-            <a:r>
-              <a:rPr lang="en-US" sz="1000" dirty="0">
-                <a:solidFill>
-                  <a:srgbClr val="5A6B85"/>
-                </a:solidFill>
-                <a:latin typeface="Calibri" pitchFamily="34" charset="0"/>
-                <a:ea typeface="Calibri" pitchFamily="34" charset="-122"/>
-                <a:cs typeface="Calibri" pitchFamily="34" charset="-120"/>
-              </a:rPr>
-              <a:t>Spec-Driven Development with Agentic AI</a:t>
-            </a:r>
-            <a:endParaRPr lang="en-US" sz="1000" dirty="0"/>
-          </a:p>
-        </p:txBody>
-      </p:sp>
-    </p:spTree>
-  </p:cSld>
-  <p:clrMapOvr>
-    <a:masterClrMapping/>
-  </p:clrMapOvr>
-</p:sld>
-</file>
-
 <file path=ppt/slides/slide2.xml><?xml version="1.0" encoding="utf-8"?>
 <p:sld xmlns:a="http://schemas.openxmlformats.org/drawingml/2006/main" xmlns:r="http://schemas.openxmlformats.org/officeDocument/2006/relationships" xmlns:p="http://schemas.openxmlformats.org/presentationml/2006/main">
   <p:cSld name="Slide 2">
@@ -5594,7 +5251,7 @@
                 <a:ea typeface="Calibri" pitchFamily="34" charset="-122"/>
                 <a:cs typeface="Calibri" pitchFamily="34" charset="-120"/>
               </a:rPr>
-              <a:t>fan-out and fan-in step types dispatch a step across a list of items and aggregate the results, a direct primitive for coordinating parallel agent work across a task graph.</a:t>
+              <a:t>fan-out and fan-in step types dispatch a step across a list of items and aggregate the results: a direct primitive for coordinating parallel agent work across a task graph.</a:t>
             </a:r>
             <a:endParaRPr lang="en-US" sz="1400" dirty="0"/>
           </a:p>

--- a/presentation/Module-7_Multi-Agent-Workflows-and-Team-Adoption.pptx
+++ b/presentation/Module-7_Multi-Agent-Workflows-and-Team-Adoption.pptx
@@ -1456,6 +1456,54 @@
           <a:chExt cx="0" cy="0"/>
         </a:xfrm>
       </p:grpSpPr>
+      <p:sp>
+        <p:nvSpPr>
+          <p:cNvPr id="25" name="Slide Number Placeholder 0"/>
+          <p:cNvSpPr>
+            <a:spLocks noGrp="1"/>
+          </p:cNvSpPr>
+          <p:nvPr>
+            <p:ph type="sldNum" sz="quarter" idx="4294967295"/>
+          </p:nvPr>
+        </p:nvSpPr>
+        <p:spPr>
+          <a:xfrm>
+            <a:off x="5821528" y="6473952"/>
+            <a:ext cx="548640" cy="274320"/>
+          </a:xfrm>
+          <a:prstGeom prst="rect">
+            <a:avLst/>
+          </a:prstGeom>
+          <a:extLst>
+            <a:ext uri="{C572A759-6A51-4108-AA02-DFA0A04FC94B}">
+              <ma14:wrappingTextBoxFlag xmlns:ma14="http://schemas.microsoft.com/office/mac/drawingml/2011/main" val="0"/>
+            </a:ext>
+          </a:extLst>
+        </p:spPr>
+        <p:txBody>
+          <a:bodyPr anchor="ctr"/>
+          <a:lstStyle>
+            <a:lvl1pPr>
+              <a:defRPr sz="1000">
+                <a:solidFill>
+                  <a:srgbClr val="8CA3C7"/>
+                </a:solidFill>
+                <a:latin typeface="Calibri"/>
+                <a:ea typeface="Calibri"/>
+                <a:cs typeface="Calibri"/>
+              </a:defRPr>
+            </a:lvl1pPr>
+          </a:lstStyle>
+          <a:p>
+            <a:pPr algn="ctr"/>
+            <a:fld id="{F7021451-1387-4CA6-816F-3879F97B5CBC}" type="slidenum">
+              <a:rPr b="0" lang="en-US"/>
+              <a:t>1000</a:t>
+            </a:fld>
+            <a:endParaRPr lang="en-US"/>
+          </a:p>
+        </p:txBody>
+      </p:sp>
     </p:spTree>
   </p:cSld>
   <p:clrMapOvr>
@@ -1481,6 +1529,54 @@
           <a:chExt cx="0" cy="0"/>
         </a:xfrm>
       </p:grpSpPr>
+      <p:sp>
+        <p:nvSpPr>
+          <p:cNvPr id="25" name="Slide Number Placeholder 0"/>
+          <p:cNvSpPr>
+            <a:spLocks noGrp="1"/>
+          </p:cNvSpPr>
+          <p:nvPr>
+            <p:ph type="sldNum" sz="quarter" idx="4294967295"/>
+          </p:nvPr>
+        </p:nvSpPr>
+        <p:spPr>
+          <a:xfrm>
+            <a:off x="5821528" y="6473952"/>
+            <a:ext cx="548640" cy="274320"/>
+          </a:xfrm>
+          <a:prstGeom prst="rect">
+            <a:avLst/>
+          </a:prstGeom>
+          <a:extLst>
+            <a:ext uri="{C572A759-6A51-4108-AA02-DFA0A04FC94B}">
+              <ma14:wrappingTextBoxFlag xmlns:ma14="http://schemas.microsoft.com/office/mac/drawingml/2011/main" val="0"/>
+            </a:ext>
+          </a:extLst>
+        </p:spPr>
+        <p:txBody>
+          <a:bodyPr anchor="ctr"/>
+          <a:lstStyle>
+            <a:lvl1pPr>
+              <a:defRPr sz="1000">
+                <a:solidFill>
+                  <a:srgbClr val="8CA3C7"/>
+                </a:solidFill>
+                <a:latin typeface="Calibri"/>
+                <a:ea typeface="Calibri"/>
+                <a:cs typeface="Calibri"/>
+              </a:defRPr>
+            </a:lvl1pPr>
+          </a:lstStyle>
+          <a:p>
+            <a:pPr algn="ctr"/>
+            <a:fld id="{F7021451-1387-4CA6-816F-3879F97B5CBC}" type="slidenum">
+              <a:rPr b="0" lang="en-US"/>
+              <a:t>null</a:t>
+            </a:fld>
+            <a:endParaRPr lang="en-US"/>
+          </a:p>
+        </p:txBody>
+      </p:sp>
     </p:spTree>
   </p:cSld>
   <p:clrMap bg1="lt1" tx1="dk1" bg2="lt2" tx2="dk2" accent1="accent1" accent2="accent2" accent3="accent3" accent4="accent4" accent5="accent5" accent6="accent6" hlink="hlink" folHlink="folHlink"/>
@@ -1983,6 +2079,54 @@
               <a:t>Coordinating parallel work, and keeping an audit trail across teams and toolchains.</a:t>
             </a:r>
             <a:endParaRPr lang="en-US" sz="1800" dirty="0"/>
+          </a:p>
+        </p:txBody>
+      </p:sp>
+      <p:sp>
+        <p:nvSpPr>
+          <p:cNvPr id="25" name="Slide Number Placeholder 0"/>
+          <p:cNvSpPr>
+            <a:spLocks noGrp="1"/>
+          </p:cNvSpPr>
+          <p:nvPr>
+            <p:ph type="sldNum" sz="quarter" idx="4294967295"/>
+          </p:nvPr>
+        </p:nvSpPr>
+        <p:spPr>
+          <a:xfrm>
+            <a:off x="5821528" y="6473952"/>
+            <a:ext cx="548640" cy="274320"/>
+          </a:xfrm>
+          <a:prstGeom prst="rect">
+            <a:avLst/>
+          </a:prstGeom>
+          <a:extLst>
+            <a:ext uri="{C572A759-6A51-4108-AA02-DFA0A04FC94B}">
+              <ma14:wrappingTextBoxFlag xmlns:ma14="http://schemas.microsoft.com/office/mac/drawingml/2011/main" val="0"/>
+            </a:ext>
+          </a:extLst>
+        </p:spPr>
+        <p:txBody>
+          <a:bodyPr anchor="ctr"/>
+          <a:lstStyle>
+            <a:lvl1pPr>
+              <a:defRPr sz="1000">
+                <a:solidFill>
+                  <a:srgbClr val="8CA3C7"/>
+                </a:solidFill>
+                <a:latin typeface="Calibri"/>
+                <a:ea typeface="Calibri"/>
+                <a:cs typeface="Calibri"/>
+              </a:defRPr>
+            </a:lvl1pPr>
+          </a:lstStyle>
+          <a:p>
+            <a:pPr algn="ctr"/>
+            <a:fld id="{F7021451-1387-4CA6-816F-3879F97B5CBC}" type="slidenum">
+              <a:rPr b="0" lang="en-US"/>
+              <a:t>1</a:t>
+            </a:fld>
+            <a:endParaRPr lang="en-US"/>
           </a:p>
         </p:txBody>
       </p:sp>
@@ -2961,6 +3105,54 @@
           </a:p>
         </p:txBody>
       </p:sp>
+      <p:sp>
+        <p:nvSpPr>
+          <p:cNvPr id="25" name="Slide Number Placeholder 0"/>
+          <p:cNvSpPr>
+            <a:spLocks noGrp="1"/>
+          </p:cNvSpPr>
+          <p:nvPr>
+            <p:ph type="sldNum" sz="quarter" idx="4294967295"/>
+          </p:nvPr>
+        </p:nvSpPr>
+        <p:spPr>
+          <a:xfrm>
+            <a:off x="5821528" y="6473952"/>
+            <a:ext cx="548640" cy="274320"/>
+          </a:xfrm>
+          <a:prstGeom prst="rect">
+            <a:avLst/>
+          </a:prstGeom>
+          <a:extLst>
+            <a:ext uri="{C572A759-6A51-4108-AA02-DFA0A04FC94B}">
+              <ma14:wrappingTextBoxFlag xmlns:ma14="http://schemas.microsoft.com/office/mac/drawingml/2011/main" val="0"/>
+            </a:ext>
+          </a:extLst>
+        </p:spPr>
+        <p:txBody>
+          <a:bodyPr anchor="ctr"/>
+          <a:lstStyle>
+            <a:lvl1pPr>
+              <a:defRPr sz="1000">
+                <a:solidFill>
+                  <a:srgbClr val="5A6B85"/>
+                </a:solidFill>
+                <a:latin typeface="Calibri"/>
+                <a:ea typeface="Calibri"/>
+                <a:cs typeface="Calibri"/>
+              </a:defRPr>
+            </a:lvl1pPr>
+          </a:lstStyle>
+          <a:p>
+            <a:pPr algn="ctr"/>
+            <a:fld id="{F7021451-1387-4CA6-816F-3879F97B5CBC}" type="slidenum">
+              <a:rPr b="0" lang="en-US"/>
+              <a:t>10</a:t>
+            </a:fld>
+            <a:endParaRPr lang="en-US"/>
+          </a:p>
+        </p:txBody>
+      </p:sp>
     </p:spTree>
   </p:cSld>
   <p:clrMapOvr>
@@ -3287,6 +3479,54 @@
           </a:p>
         </p:txBody>
       </p:sp>
+      <p:sp>
+        <p:nvSpPr>
+          <p:cNvPr id="25" name="Slide Number Placeholder 0"/>
+          <p:cNvSpPr>
+            <a:spLocks noGrp="1"/>
+          </p:cNvSpPr>
+          <p:nvPr>
+            <p:ph type="sldNum" sz="quarter" idx="4294967295"/>
+          </p:nvPr>
+        </p:nvSpPr>
+        <p:spPr>
+          <a:xfrm>
+            <a:off x="5821528" y="6473952"/>
+            <a:ext cx="548640" cy="274320"/>
+          </a:xfrm>
+          <a:prstGeom prst="rect">
+            <a:avLst/>
+          </a:prstGeom>
+          <a:extLst>
+            <a:ext uri="{C572A759-6A51-4108-AA02-DFA0A04FC94B}">
+              <ma14:wrappingTextBoxFlag xmlns:ma14="http://schemas.microsoft.com/office/mac/drawingml/2011/main" val="0"/>
+            </a:ext>
+          </a:extLst>
+        </p:spPr>
+        <p:txBody>
+          <a:bodyPr anchor="ctr"/>
+          <a:lstStyle>
+            <a:lvl1pPr>
+              <a:defRPr sz="1000">
+                <a:solidFill>
+                  <a:srgbClr val="8CA3C7"/>
+                </a:solidFill>
+                <a:latin typeface="Calibri"/>
+                <a:ea typeface="Calibri"/>
+                <a:cs typeface="Calibri"/>
+              </a:defRPr>
+            </a:lvl1pPr>
+          </a:lstStyle>
+          <a:p>
+            <a:pPr algn="ctr"/>
+            <a:fld id="{F7021451-1387-4CA6-816F-3879F97B5CBC}" type="slidenum">
+              <a:rPr b="0" lang="en-US"/>
+              <a:t>11</a:t>
+            </a:fld>
+            <a:endParaRPr lang="en-US"/>
+          </a:p>
+        </p:txBody>
+      </p:sp>
     </p:spTree>
   </p:cSld>
   <p:clrMapOvr>
@@ -3730,6 +3970,54 @@
           </a:p>
         </p:txBody>
       </p:sp>
+      <p:sp>
+        <p:nvSpPr>
+          <p:cNvPr id="25" name="Slide Number Placeholder 0"/>
+          <p:cNvSpPr>
+            <a:spLocks noGrp="1"/>
+          </p:cNvSpPr>
+          <p:nvPr>
+            <p:ph type="sldNum" sz="quarter" idx="4294967295"/>
+          </p:nvPr>
+        </p:nvSpPr>
+        <p:spPr>
+          <a:xfrm>
+            <a:off x="5821528" y="6473952"/>
+            <a:ext cx="548640" cy="274320"/>
+          </a:xfrm>
+          <a:prstGeom prst="rect">
+            <a:avLst/>
+          </a:prstGeom>
+          <a:extLst>
+            <a:ext uri="{C572A759-6A51-4108-AA02-DFA0A04FC94B}">
+              <ma14:wrappingTextBoxFlag xmlns:ma14="http://schemas.microsoft.com/office/mac/drawingml/2011/main" val="0"/>
+            </a:ext>
+          </a:extLst>
+        </p:spPr>
+        <p:txBody>
+          <a:bodyPr anchor="ctr"/>
+          <a:lstStyle>
+            <a:lvl1pPr>
+              <a:defRPr sz="1000">
+                <a:solidFill>
+                  <a:srgbClr val="5A6B85"/>
+                </a:solidFill>
+                <a:latin typeface="Calibri"/>
+                <a:ea typeface="Calibri"/>
+                <a:cs typeface="Calibri"/>
+              </a:defRPr>
+            </a:lvl1pPr>
+          </a:lstStyle>
+          <a:p>
+            <a:pPr algn="ctr"/>
+            <a:fld id="{F7021451-1387-4CA6-816F-3879F97B5CBC}" type="slidenum">
+              <a:rPr b="0" lang="en-US"/>
+              <a:t>2</a:t>
+            </a:fld>
+            <a:endParaRPr lang="en-US"/>
+          </a:p>
+        </p:txBody>
+      </p:sp>
     </p:spTree>
   </p:cSld>
   <p:clrMapOvr>
@@ -4080,6 +4368,54 @@
           </a:p>
         </p:txBody>
       </p:sp>
+      <p:sp>
+        <p:nvSpPr>
+          <p:cNvPr id="25" name="Slide Number Placeholder 0"/>
+          <p:cNvSpPr>
+            <a:spLocks noGrp="1"/>
+          </p:cNvSpPr>
+          <p:nvPr>
+            <p:ph type="sldNum" sz="quarter" idx="4294967295"/>
+          </p:nvPr>
+        </p:nvSpPr>
+        <p:spPr>
+          <a:xfrm>
+            <a:off x="5821528" y="6473952"/>
+            <a:ext cx="548640" cy="274320"/>
+          </a:xfrm>
+          <a:prstGeom prst="rect">
+            <a:avLst/>
+          </a:prstGeom>
+          <a:extLst>
+            <a:ext uri="{C572A759-6A51-4108-AA02-DFA0A04FC94B}">
+              <ma14:wrappingTextBoxFlag xmlns:ma14="http://schemas.microsoft.com/office/mac/drawingml/2011/main" val="0"/>
+            </a:ext>
+          </a:extLst>
+        </p:spPr>
+        <p:txBody>
+          <a:bodyPr anchor="ctr"/>
+          <a:lstStyle>
+            <a:lvl1pPr>
+              <a:defRPr sz="1000">
+                <a:solidFill>
+                  <a:srgbClr val="5A6B85"/>
+                </a:solidFill>
+                <a:latin typeface="Calibri"/>
+                <a:ea typeface="Calibri"/>
+                <a:cs typeface="Calibri"/>
+              </a:defRPr>
+            </a:lvl1pPr>
+          </a:lstStyle>
+          <a:p>
+            <a:pPr algn="ctr"/>
+            <a:fld id="{F7021451-1387-4CA6-816F-3879F97B5CBC}" type="slidenum">
+              <a:rPr b="0" lang="en-US"/>
+              <a:t>3</a:t>
+            </a:fld>
+            <a:endParaRPr lang="en-US"/>
+          </a:p>
+        </p:txBody>
+      </p:sp>
     </p:spTree>
   </p:cSld>
   <p:clrMapOvr>
@@ -4430,6 +4766,54 @@
           </a:p>
         </p:txBody>
       </p:sp>
+      <p:sp>
+        <p:nvSpPr>
+          <p:cNvPr id="25" name="Slide Number Placeholder 0"/>
+          <p:cNvSpPr>
+            <a:spLocks noGrp="1"/>
+          </p:cNvSpPr>
+          <p:nvPr>
+            <p:ph type="sldNum" sz="quarter" idx="4294967295"/>
+          </p:nvPr>
+        </p:nvSpPr>
+        <p:spPr>
+          <a:xfrm>
+            <a:off x="5821528" y="6473952"/>
+            <a:ext cx="548640" cy="274320"/>
+          </a:xfrm>
+          <a:prstGeom prst="rect">
+            <a:avLst/>
+          </a:prstGeom>
+          <a:extLst>
+            <a:ext uri="{C572A759-6A51-4108-AA02-DFA0A04FC94B}">
+              <ma14:wrappingTextBoxFlag xmlns:ma14="http://schemas.microsoft.com/office/mac/drawingml/2011/main" val="0"/>
+            </a:ext>
+          </a:extLst>
+        </p:spPr>
+        <p:txBody>
+          <a:bodyPr anchor="ctr"/>
+          <a:lstStyle>
+            <a:lvl1pPr>
+              <a:defRPr sz="1000">
+                <a:solidFill>
+                  <a:srgbClr val="5A6B85"/>
+                </a:solidFill>
+                <a:latin typeface="Calibri"/>
+                <a:ea typeface="Calibri"/>
+                <a:cs typeface="Calibri"/>
+              </a:defRPr>
+            </a:lvl1pPr>
+          </a:lstStyle>
+          <a:p>
+            <a:pPr algn="ctr"/>
+            <a:fld id="{F7021451-1387-4CA6-816F-3879F97B5CBC}" type="slidenum">
+              <a:rPr b="0" lang="en-US"/>
+              <a:t>4</a:t>
+            </a:fld>
+            <a:endParaRPr lang="en-US"/>
+          </a:p>
+        </p:txBody>
+      </p:sp>
     </p:spTree>
   </p:cSld>
   <p:clrMapOvr>
@@ -4740,6 +5124,54 @@
           </a:p>
         </p:txBody>
       </p:sp>
+      <p:sp>
+        <p:nvSpPr>
+          <p:cNvPr id="25" name="Slide Number Placeholder 0"/>
+          <p:cNvSpPr>
+            <a:spLocks noGrp="1"/>
+          </p:cNvSpPr>
+          <p:nvPr>
+            <p:ph type="sldNum" sz="quarter" idx="4294967295"/>
+          </p:nvPr>
+        </p:nvSpPr>
+        <p:spPr>
+          <a:xfrm>
+            <a:off x="5821528" y="6473952"/>
+            <a:ext cx="548640" cy="274320"/>
+          </a:xfrm>
+          <a:prstGeom prst="rect">
+            <a:avLst/>
+          </a:prstGeom>
+          <a:extLst>
+            <a:ext uri="{C572A759-6A51-4108-AA02-DFA0A04FC94B}">
+              <ma14:wrappingTextBoxFlag xmlns:ma14="http://schemas.microsoft.com/office/mac/drawingml/2011/main" val="0"/>
+            </a:ext>
+          </a:extLst>
+        </p:spPr>
+        <p:txBody>
+          <a:bodyPr anchor="ctr"/>
+          <a:lstStyle>
+            <a:lvl1pPr>
+              <a:defRPr sz="1000">
+                <a:solidFill>
+                  <a:srgbClr val="8CA3C7"/>
+                </a:solidFill>
+                <a:latin typeface="Calibri"/>
+                <a:ea typeface="Calibri"/>
+                <a:cs typeface="Calibri"/>
+              </a:defRPr>
+            </a:lvl1pPr>
+          </a:lstStyle>
+          <a:p>
+            <a:pPr algn="ctr"/>
+            <a:fld id="{F7021451-1387-4CA6-816F-3879F97B5CBC}" type="slidenum">
+              <a:rPr b="0" lang="en-US"/>
+              <a:t>5</a:t>
+            </a:fld>
+            <a:endParaRPr lang="en-US"/>
+          </a:p>
+        </p:txBody>
+      </p:sp>
     </p:spTree>
   </p:cSld>
   <p:clrMapOvr>
@@ -4805,7 +5237,7 @@
                 <a:ea typeface="Calibri" pitchFamily="34" charset="-122"/>
                 <a:cs typeface="Calibri" pitchFamily="34" charset="-120"/>
               </a:rPr>
-              <a:t>APPLYING THIS WITH</a:t>
+              <a:t>APPLYING THE CONCEPTS</a:t>
             </a:r>
             <a:endParaRPr lang="en-US" sz="1400" dirty="0"/>
           </a:p>
@@ -4925,6 +5357,54 @@
               <a:t>Spec-Driven Development with Agentic AI</a:t>
             </a:r>
             <a:endParaRPr lang="en-US" sz="1000" dirty="0"/>
+          </a:p>
+        </p:txBody>
+      </p:sp>
+      <p:sp>
+        <p:nvSpPr>
+          <p:cNvPr id="25" name="Slide Number Placeholder 0"/>
+          <p:cNvSpPr>
+            <a:spLocks noGrp="1"/>
+          </p:cNvSpPr>
+          <p:nvPr>
+            <p:ph type="sldNum" sz="quarter" idx="4294967295"/>
+          </p:nvPr>
+        </p:nvSpPr>
+        <p:spPr>
+          <a:xfrm>
+            <a:off x="5821528" y="6473952"/>
+            <a:ext cx="548640" cy="274320"/>
+          </a:xfrm>
+          <a:prstGeom prst="rect">
+            <a:avLst/>
+          </a:prstGeom>
+          <a:extLst>
+            <a:ext uri="{C572A759-6A51-4108-AA02-DFA0A04FC94B}">
+              <ma14:wrappingTextBoxFlag xmlns:ma14="http://schemas.microsoft.com/office/mac/drawingml/2011/main" val="0"/>
+            </a:ext>
+          </a:extLst>
+        </p:spPr>
+        <p:txBody>
+          <a:bodyPr anchor="ctr"/>
+          <a:lstStyle>
+            <a:lvl1pPr>
+              <a:defRPr sz="1000">
+                <a:solidFill>
+                  <a:srgbClr val="8CA3C7"/>
+                </a:solidFill>
+                <a:latin typeface="Calibri"/>
+                <a:ea typeface="Calibri"/>
+                <a:cs typeface="Calibri"/>
+              </a:defRPr>
+            </a:lvl1pPr>
+          </a:lstStyle>
+          <a:p>
+            <a:pPr algn="ctr"/>
+            <a:fld id="{F7021451-1387-4CA6-816F-3879F97B5CBC}" type="slidenum">
+              <a:rPr b="0" lang="en-US"/>
+              <a:t>6</a:t>
+            </a:fld>
+            <a:endParaRPr lang="en-US"/>
           </a:p>
         </p:txBody>
       </p:sp>
@@ -5410,6 +5890,54 @@
           </a:p>
         </p:txBody>
       </p:sp>
+      <p:sp>
+        <p:nvSpPr>
+          <p:cNvPr id="25" name="Slide Number Placeholder 0"/>
+          <p:cNvSpPr>
+            <a:spLocks noGrp="1"/>
+          </p:cNvSpPr>
+          <p:nvPr>
+            <p:ph type="sldNum" sz="quarter" idx="4294967295"/>
+          </p:nvPr>
+        </p:nvSpPr>
+        <p:spPr>
+          <a:xfrm>
+            <a:off x="5821528" y="6473952"/>
+            <a:ext cx="548640" cy="274320"/>
+          </a:xfrm>
+          <a:prstGeom prst="rect">
+            <a:avLst/>
+          </a:prstGeom>
+          <a:extLst>
+            <a:ext uri="{C572A759-6A51-4108-AA02-DFA0A04FC94B}">
+              <ma14:wrappingTextBoxFlag xmlns:ma14="http://schemas.microsoft.com/office/mac/drawingml/2011/main" val="0"/>
+            </a:ext>
+          </a:extLst>
+        </p:spPr>
+        <p:txBody>
+          <a:bodyPr anchor="ctr"/>
+          <a:lstStyle>
+            <a:lvl1pPr>
+              <a:defRPr sz="1000">
+                <a:solidFill>
+                  <a:srgbClr val="5A6B85"/>
+                </a:solidFill>
+                <a:latin typeface="Calibri"/>
+                <a:ea typeface="Calibri"/>
+                <a:cs typeface="Calibri"/>
+              </a:defRPr>
+            </a:lvl1pPr>
+          </a:lstStyle>
+          <a:p>
+            <a:pPr algn="ctr"/>
+            <a:fld id="{F7021451-1387-4CA6-816F-3879F97B5CBC}" type="slidenum">
+              <a:rPr b="0" lang="en-US"/>
+              <a:t>7</a:t>
+            </a:fld>
+            <a:endParaRPr lang="en-US"/>
+          </a:p>
+        </p:txBody>
+      </p:sp>
     </p:spTree>
   </p:cSld>
   <p:clrMapOvr>
@@ -5475,7 +6003,7 @@
                 <a:ea typeface="Calibri" pitchFamily="34" charset="-122"/>
                 <a:cs typeface="Calibri" pitchFamily="34" charset="-120"/>
               </a:rPr>
-              <a:t>APPLYING THIS WITH</a:t>
+              <a:t>APPLYING THE CONCEPTS</a:t>
             </a:r>
             <a:endParaRPr lang="en-US" sz="1400" dirty="0"/>
           </a:p>
@@ -5528,45 +6056,6 @@
         </p:nvSpPr>
         <p:spPr>
           <a:xfrm>
-            <a:off x="548640" y="3977640"/>
-            <a:ext cx="9722815" cy="822960"/>
-          </a:xfrm>
-          <a:prstGeom prst="rect">
-            <a:avLst/>
-          </a:prstGeom>
-          <a:noFill/>
-          <a:ln/>
-        </p:spPr>
-        <p:txBody>
-          <a:bodyPr wrap="square" rtlCol="0" anchor="ctr"/>
-          <a:lstStyle/>
-          <a:p>
-            <a:pPr algn="l" indent="0" marL="0">
-              <a:buNone/>
-            </a:pPr>
-            <a:r>
-              <a:rPr lang="en-US" sz="1600" i="1" dirty="0">
-                <a:solidFill>
-                  <a:srgbClr val="FFFFFF"/>
-                </a:solidFill>
-                <a:latin typeface="Calibri" pitchFamily="34" charset="0"/>
-                <a:ea typeface="Calibri" pitchFamily="34" charset="-122"/>
-                <a:cs typeface="Calibri" pitchFamily="34" charset="-120"/>
-              </a:rPr>
-              <a:t>A partial fit: some of this module's concept maps, some doesn't.</a:t>
-            </a:r>
-            <a:endParaRPr lang="en-US" sz="1600" dirty="0"/>
-          </a:p>
-        </p:txBody>
-      </p:sp>
-      <p:sp>
-        <p:nvSpPr>
-          <p:cNvPr id="5" name="Text 3"/>
-          <p:cNvSpPr/>
-          <p:nvPr/>
-        </p:nvSpPr>
-        <p:spPr>
-          <a:xfrm>
             <a:off x="548640" y="6473952"/>
             <a:ext cx="5486400" cy="274320"/>
           </a:xfrm>
@@ -5600,7 +6089,7 @@
       </p:sp>
       <p:sp>
         <p:nvSpPr>
-          <p:cNvPr id="6" name="Text 4"/>
+          <p:cNvPr id="5" name="Text 3"/>
           <p:cNvSpPr/>
           <p:nvPr/>
         </p:nvSpPr>
@@ -5634,6 +6123,54 @@
               <a:t>Spec-Driven Development with Agentic AI</a:t>
             </a:r>
             <a:endParaRPr lang="en-US" sz="1000" dirty="0"/>
+          </a:p>
+        </p:txBody>
+      </p:sp>
+      <p:sp>
+        <p:nvSpPr>
+          <p:cNvPr id="25" name="Slide Number Placeholder 0"/>
+          <p:cNvSpPr>
+            <a:spLocks noGrp="1"/>
+          </p:cNvSpPr>
+          <p:nvPr>
+            <p:ph type="sldNum" sz="quarter" idx="4294967295"/>
+          </p:nvPr>
+        </p:nvSpPr>
+        <p:spPr>
+          <a:xfrm>
+            <a:off x="5821528" y="6473952"/>
+            <a:ext cx="548640" cy="274320"/>
+          </a:xfrm>
+          <a:prstGeom prst="rect">
+            <a:avLst/>
+          </a:prstGeom>
+          <a:extLst>
+            <a:ext uri="{C572A759-6A51-4108-AA02-DFA0A04FC94B}">
+              <ma14:wrappingTextBoxFlag xmlns:ma14="http://schemas.microsoft.com/office/mac/drawingml/2011/main" val="0"/>
+            </a:ext>
+          </a:extLst>
+        </p:spPr>
+        <p:txBody>
+          <a:bodyPr anchor="ctr"/>
+          <a:lstStyle>
+            <a:lvl1pPr>
+              <a:defRPr sz="1000">
+                <a:solidFill>
+                  <a:srgbClr val="8CA3C7"/>
+                </a:solidFill>
+                <a:latin typeface="Calibri"/>
+                <a:ea typeface="Calibri"/>
+                <a:cs typeface="Calibri"/>
+              </a:defRPr>
+            </a:lvl1pPr>
+          </a:lstStyle>
+          <a:p>
+            <a:pPr algn="ctr"/>
+            <a:fld id="{F7021451-1387-4CA6-816F-3879F97B5CBC}" type="slidenum">
+              <a:rPr b="0" lang="en-US"/>
+              <a:t>8</a:t>
+            </a:fld>
+            <a:endParaRPr lang="en-US"/>
           </a:p>
         </p:txBody>
       </p:sp>
@@ -6116,6 +6653,54 @@
               <a:t>Spec-Driven Development with Agentic AI</a:t>
             </a:r>
             <a:endParaRPr lang="en-US" sz="1000" dirty="0"/>
+          </a:p>
+        </p:txBody>
+      </p:sp>
+      <p:sp>
+        <p:nvSpPr>
+          <p:cNvPr id="25" name="Slide Number Placeholder 0"/>
+          <p:cNvSpPr>
+            <a:spLocks noGrp="1"/>
+          </p:cNvSpPr>
+          <p:nvPr>
+            <p:ph type="sldNum" sz="quarter" idx="4294967295"/>
+          </p:nvPr>
+        </p:nvSpPr>
+        <p:spPr>
+          <a:xfrm>
+            <a:off x="5821528" y="6473952"/>
+            <a:ext cx="548640" cy="274320"/>
+          </a:xfrm>
+          <a:prstGeom prst="rect">
+            <a:avLst/>
+          </a:prstGeom>
+          <a:extLst>
+            <a:ext uri="{C572A759-6A51-4108-AA02-DFA0A04FC94B}">
+              <ma14:wrappingTextBoxFlag xmlns:ma14="http://schemas.microsoft.com/office/mac/drawingml/2011/main" val="0"/>
+            </a:ext>
+          </a:extLst>
+        </p:spPr>
+        <p:txBody>
+          <a:bodyPr anchor="ctr"/>
+          <a:lstStyle>
+            <a:lvl1pPr>
+              <a:defRPr sz="1000">
+                <a:solidFill>
+                  <a:srgbClr val="5A6B85"/>
+                </a:solidFill>
+                <a:latin typeface="Calibri"/>
+                <a:ea typeface="Calibri"/>
+                <a:cs typeface="Calibri"/>
+              </a:defRPr>
+            </a:lvl1pPr>
+          </a:lstStyle>
+          <a:p>
+            <a:pPr algn="ctr"/>
+            <a:fld id="{F7021451-1387-4CA6-816F-3879F97B5CBC}" type="slidenum">
+              <a:rPr b="0" lang="en-US"/>
+              <a:t>9</a:t>
+            </a:fld>
+            <a:endParaRPr lang="en-US"/>
           </a:p>
         </p:txBody>
       </p:sp>

--- a/presentation/Module-7_Multi-Agent-Workflows-and-Team-Adoption.pptx
+++ b/presentation/Module-7_Multi-Agent-Workflows-and-Team-Adoption.pptx
@@ -3277,7 +3277,7 @@
                 <a:ea typeface="Calibri" pitchFamily="34" charset="-122"/>
                 <a:cs typeface="Calibri" pitchFamily="34" charset="-120"/>
               </a:rPr>
-              <a:t>Parallelism is a property of the work, not a default setting.</a:t>
+              <a:t>Parallelism is a property of the work, not a default setting, so it has to be decided case by case, not assumed.</a:t>
             </a:r>
             <a:endParaRPr lang="en-US" sz="1700" dirty="0"/>
           </a:p>
@@ -3336,7 +3336,7 @@
                 <a:ea typeface="Calibri" pitchFamily="34" charset="-122"/>
                 <a:cs typeface="Calibri" pitchFamily="34" charset="-120"/>
               </a:rPr>
-              <a:t>Spec Kit's workflow engine gives you explicit orchestration primitives; OpenSpec's support is lighter-weight.</a:t>
+              <a:t>Spec Kit's workflow engine gives you explicit orchestration primitives; OpenSpec's support is lighter-weight and less structured.</a:t>
             </a:r>
             <a:endParaRPr lang="en-US" sz="1700" dirty="0"/>
           </a:p>
@@ -3395,7 +3395,7 @@
                 <a:ea typeface="Calibri" pitchFamily="34" charset="-122"/>
                 <a:cs typeface="Calibri" pitchFamily="34" charset="-120"/>
               </a:rPr>
-              <a:t>Delegation to a second agent is your coding agent's job, not the SDD framework's.</a:t>
+              <a:t>Delegation to a second agent is your coding agent's job, not the SDD framework's, so don't expect either framework to manage that hand-off for you.</a:t>
             </a:r>
             <a:endParaRPr lang="en-US" sz="1700" dirty="0"/>
           </a:p>
@@ -4203,7 +4203,7 @@
                 <a:ea typeface="Calibri" pitchFamily="34" charset="-122"/>
                 <a:cs typeface="Calibri" pitchFamily="34" charset="-120"/>
               </a:rPr>
-              <a:t>Some work parallelizes cleanly: independent services, independent tasks. Some doesn't: shared state, sequential dependencies.</a:t>
+              <a:t>Some work parallelizes cleanly: independent services, independent tasks. Some doesn't: shared state, sequential dependencies, so the decision to parallelize has to be made per task, not assumed by default.</a:t>
             </a:r>
             <a:endParaRPr lang="en-US" sz="1500" dirty="0"/>
           </a:p>
@@ -4284,7 +4284,7 @@
                 <a:ea typeface="Calibri" pitchFamily="34" charset="-122"/>
                 <a:cs typeface="Calibri" pitchFamily="34" charset="-120"/>
               </a:rPr>
-              <a:t>Delegating a focused sub-task to a second agent instance works best when the boundary is clear and the output is easy to review on its own.</a:t>
+              <a:t>Delegating a focused sub-task to a second agent instance works best when the boundary is clear and the output is easy to review on its own, otherwise the coordination overhead can outweigh the time saved.</a:t>
             </a:r>
             <a:endParaRPr lang="en-US" sz="1500" dirty="0"/>
           </a:p>
@@ -4601,7 +4601,7 @@
                 <a:ea typeface="Calibri" pitchFamily="34" charset="-122"/>
                 <a:cs typeface="Calibri" pitchFamily="34" charset="-120"/>
               </a:rPr>
-              <a:t>A specs/ subdirectory per service, with specs linked to issues and pull requests.</a:t>
+              <a:t>A specs/ subdirectory per service, with specs linked to issues and pull requests, so anyone can trace a change back to the requirement that justified it.</a:t>
             </a:r>
             <a:endParaRPr lang="en-US" sz="1500" dirty="0"/>
           </a:p>
@@ -4682,7 +4682,7 @@
                 <a:ea typeface="Calibri" pitchFamily="34" charset="-122"/>
                 <a:cs typeface="Calibri" pitchFamily="34" charset="-120"/>
               </a:rPr>
-              <a:t>Reviewing agent actions before execution, managing secrets and permissions, and keeping an audit trail that holds up across teams using different toolchains.</a:t>
+              <a:t>Reviewing agent actions before execution, managing secrets and permissions, and keeping an audit trail that holds up across teams using different toolchains, so governance doesn't quietly break down the moment two teams use different tools.</a:t>
             </a:r>
             <a:endParaRPr lang="en-US" sz="1500" dirty="0"/>
           </a:p>
@@ -4979,7 +4979,7 @@
                 <a:ea typeface="Calibri" pitchFamily="34" charset="-122"/>
                 <a:cs typeface="Calibri" pitchFamily="34" charset="-120"/>
               </a:rPr>
-              <a:t>Two agents editing overlapping code without visibility into each other produce conflicts no single review catches early.</a:t>
+              <a:t>Two agents editing overlapping code without visibility into each other produce conflicts no single review catches early, because neither review was looking for a conflict with work happening somewhere else.</a:t>
             </a:r>
             <a:endParaRPr lang="en-US" sz="1500" dirty="0"/>
           </a:p>
@@ -5040,7 +5040,7 @@
                 <a:ea typeface="Calibri" pitchFamily="34" charset="-122"/>
                 <a:cs typeface="Calibri" pitchFamily="34" charset="-120"/>
               </a:rPr>
-              <a:t>An audit trail only works if every agent's actions were reviewable in the first place.</a:t>
+              <a:t>An audit trail only works if every agent's actions were reviewable in the first place, so visibility has to be designed in before you parallelize, not added afterward.</a:t>
             </a:r>
             <a:endParaRPr lang="en-US" sz="1500" dirty="0"/>
           </a:p>
@@ -5656,7 +5656,7 @@
                 <a:ea typeface="Calibri" pitchFamily="34" charset="-122"/>
                 <a:cs typeface="Calibri" pitchFamily="34" charset="-120"/>
               </a:rPr>
-              <a:t>YAML-defined workflows chain commands, prompts, and shell steps into repeatable sequences, with gate steps for human checkpoints.</a:t>
+              <a:t>YAML-defined workflows chain commands, prompts, and shell steps into repeatable sequences, with gate steps for human checkpoints, so a multi-step process can be run the same way every time instead of reassembled manually.</a:t>
             </a:r>
             <a:endParaRPr lang="en-US" sz="1350" dirty="0"/>
           </a:p>
@@ -5731,7 +5731,7 @@
                 <a:ea typeface="Calibri" pitchFamily="34" charset="-122"/>
                 <a:cs typeface="Calibri" pitchFamily="34" charset="-120"/>
               </a:rPr>
-              <a:t>fan-out and fan-in step types dispatch a step across a list of items and aggregate the results: a direct primitive for coordinating parallel agent work across a task graph.</a:t>
+              <a:t>fan-out and fan-in step types dispatch a step across a list of items and aggregate the results: a direct primitive for coordinating parallel agent work across a task graph, so parallel work doesn't have to be hand-rolled each time.</a:t>
             </a:r>
             <a:endParaRPr lang="en-US" sz="1400" dirty="0"/>
           </a:p>
@@ -5806,7 +5806,7 @@
                 <a:ea typeface="Calibri" pitchFamily="34" charset="-122"/>
                 <a:cs typeface="Calibri" pitchFamily="34" charset="-120"/>
               </a:rPr>
-              <a:t>Every run persists state (state.json, log.jsonl) and can pause and resume from the exact point of interruption, doubling as an audit trail.</a:t>
+              <a:t>Every run persists state (state.json, log.jsonl) and can pause and resume from the exact point of interruption, doubling as an audit trail, so a long-running workflow doesn't have to restart from scratch after an interruption.</a:t>
             </a:r>
             <a:endParaRPr lang="en-US" sz="1400" dirty="0"/>
           </a:p>
@@ -6422,7 +6422,7 @@
                 <a:ea typeface="Calibri" pitchFamily="34" charset="-122"/>
                 <a:cs typeface="Calibri" pitchFamily="34" charset="-120"/>
               </a:rPr>
-              <a:t>Coordinates multiple parallel change streams at once, detecting and resolving spec conflicts between them by checking what's actually implemented.</a:t>
+              <a:t>Coordinates multiple parallel change streams at once, detecting and resolving spec conflicts between them by checking what's actually implemented, which is the closest OpenSpec gets to explicit multi-agent orchestration.</a:t>
             </a:r>
             <a:endParaRPr lang="en-US" sz="1350" dirty="0"/>
           </a:p>
@@ -6497,7 +6497,7 @@
                 <a:ea typeface="Calibri" pitchFamily="34" charset="-122"/>
                 <a:cs typeface="Calibri" pitchFamily="34" charset="-120"/>
               </a:rPr>
-              <a:t>OpenSpec's beta "Stores" feature extends planning across multiple repos or teams, for organizations working past a single-repo scope.</a:t>
+              <a:t>OpenSpec's beta "Stores" feature extends planning across multiple repos or teams, for organizations working past a single-repo scope, worth knowing about even though it's still evolving.</a:t>
             </a:r>
             <a:endParaRPr lang="en-US" sz="1400" dirty="0"/>
           </a:p>
@@ -6572,7 +6572,7 @@
                 <a:ea typeface="Calibri" pitchFamily="34" charset="-122"/>
                 <a:cs typeface="Calibri" pitchFamily="34" charset="-120"/>
               </a:rPr>
-              <a:t>Genuine agent-to-agent delegation is a capability of the underlying coding agent (Claude Code subagents, Copilot Fleet mode), not a feature either SDD framework owns directly.</a:t>
+              <a:t>Genuine agent-to-agent delegation is a capability of the underlying coding agent (Claude Code subagents, Copilot Fleet mode), not a feature either SDD framework owns directly, so this is a distinction worth keeping straight when evaluating either tool.</a:t>
             </a:r>
             <a:endParaRPr lang="en-US" sz="1400" dirty="0"/>
           </a:p>
